--- a/oops assignment.pptx
+++ b/oops assignment.pptx
@@ -3194,7 +3194,7 @@
           <a:p>
             <a:fld id="{B1716C7A-A5D0-4AE2-95E8-C7748F3AD0A9}" type="datetimeFigureOut">
               <a:rPr lang="en-US" smtClean="0"/>
-              <a:t>3/12/2026</a:t>
+              <a:t>3/14/2026</a:t>
             </a:fld>
             <a:endParaRPr lang="en-US"/>
           </a:p>
@@ -3392,7 +3392,7 @@
           <a:p>
             <a:fld id="{B1716C7A-A5D0-4AE2-95E8-C7748F3AD0A9}" type="datetimeFigureOut">
               <a:rPr lang="en-US" smtClean="0"/>
-              <a:t>3/12/2026</a:t>
+              <a:t>3/14/2026</a:t>
             </a:fld>
             <a:endParaRPr lang="en-US"/>
           </a:p>
@@ -3600,7 +3600,7 @@
           <a:p>
             <a:fld id="{B1716C7A-A5D0-4AE2-95E8-C7748F3AD0A9}" type="datetimeFigureOut">
               <a:rPr lang="en-US" smtClean="0"/>
-              <a:t>3/12/2026</a:t>
+              <a:t>3/14/2026</a:t>
             </a:fld>
             <a:endParaRPr lang="en-US"/>
           </a:p>
@@ -3798,7 +3798,7 @@
           <a:p>
             <a:fld id="{B1716C7A-A5D0-4AE2-95E8-C7748F3AD0A9}" type="datetimeFigureOut">
               <a:rPr lang="en-US" smtClean="0"/>
-              <a:t>3/12/2026</a:t>
+              <a:t>3/14/2026</a:t>
             </a:fld>
             <a:endParaRPr lang="en-US"/>
           </a:p>
@@ -4073,7 +4073,7 @@
           <a:p>
             <a:fld id="{B1716C7A-A5D0-4AE2-95E8-C7748F3AD0A9}" type="datetimeFigureOut">
               <a:rPr lang="en-US" smtClean="0"/>
-              <a:t>3/12/2026</a:t>
+              <a:t>3/14/2026</a:t>
             </a:fld>
             <a:endParaRPr lang="en-US"/>
           </a:p>
@@ -4338,7 +4338,7 @@
           <a:p>
             <a:fld id="{B1716C7A-A5D0-4AE2-95E8-C7748F3AD0A9}" type="datetimeFigureOut">
               <a:rPr lang="en-US" smtClean="0"/>
-              <a:t>3/12/2026</a:t>
+              <a:t>3/14/2026</a:t>
             </a:fld>
             <a:endParaRPr lang="en-US"/>
           </a:p>
@@ -4750,7 +4750,7 @@
           <a:p>
             <a:fld id="{B1716C7A-A5D0-4AE2-95E8-C7748F3AD0A9}" type="datetimeFigureOut">
               <a:rPr lang="en-US" smtClean="0"/>
-              <a:t>3/12/2026</a:t>
+              <a:t>3/14/2026</a:t>
             </a:fld>
             <a:endParaRPr lang="en-US"/>
           </a:p>
@@ -4891,7 +4891,7 @@
           <a:p>
             <a:fld id="{B1716C7A-A5D0-4AE2-95E8-C7748F3AD0A9}" type="datetimeFigureOut">
               <a:rPr lang="en-US" smtClean="0"/>
-              <a:t>3/12/2026</a:t>
+              <a:t>3/14/2026</a:t>
             </a:fld>
             <a:endParaRPr lang="en-US"/>
           </a:p>
@@ -5004,7 +5004,7 @@
           <a:p>
             <a:fld id="{B1716C7A-A5D0-4AE2-95E8-C7748F3AD0A9}" type="datetimeFigureOut">
               <a:rPr lang="en-US" smtClean="0"/>
-              <a:t>3/12/2026</a:t>
+              <a:t>3/14/2026</a:t>
             </a:fld>
             <a:endParaRPr lang="en-US"/>
           </a:p>
@@ -5315,7 +5315,7 @@
           <a:p>
             <a:fld id="{B1716C7A-A5D0-4AE2-95E8-C7748F3AD0A9}" type="datetimeFigureOut">
               <a:rPr lang="en-US" smtClean="0"/>
-              <a:t>3/12/2026</a:t>
+              <a:t>3/14/2026</a:t>
             </a:fld>
             <a:endParaRPr lang="en-US"/>
           </a:p>
@@ -5603,7 +5603,7 @@
           <a:p>
             <a:fld id="{B1716C7A-A5D0-4AE2-95E8-C7748F3AD0A9}" type="datetimeFigureOut">
               <a:rPr lang="en-US" smtClean="0"/>
-              <a:t>3/12/2026</a:t>
+              <a:t>3/14/2026</a:t>
             </a:fld>
             <a:endParaRPr lang="en-US"/>
           </a:p>
@@ -5844,7 +5844,7 @@
           <a:p>
             <a:fld id="{B1716C7A-A5D0-4AE2-95E8-C7748F3AD0A9}" type="datetimeFigureOut">
               <a:rPr lang="en-US" smtClean="0"/>
-              <a:t>3/12/2026</a:t>
+              <a:t>3/14/2026</a:t>
             </a:fld>
             <a:endParaRPr lang="en-US"/>
           </a:p>
